--- a/files/FOMCVoice_15min_Slides.pptx
+++ b/files/FOMCVoice_15min_Slides.pptx
@@ -1917,13 +1917,51 @@
       </p:sp>
       <p:sp>
         <p:nvSpPr>
-          <p:cNvPr id="6" name="Shape 4"/>
-          <p:cNvSpPr/>
-          <p:nvPr/>
-        </p:nvSpPr>
-        <p:spPr>
-          <a:xfrm>
-            <a:off x="658368" y="3584448"/>
+          <p:cNvPr id="6" name="Text 4"/>
+          <p:cNvSpPr/>
+          <p:nvPr/>
+        </p:nvSpPr>
+        <p:spPr>
+          <a:xfrm>
+            <a:off x="658368" y="3346704"/>
+            <a:ext cx="10607040" cy="274320"/>
+          </a:xfrm>
+          <a:prstGeom prst="rect">
+            <a:avLst/>
+          </a:prstGeom>
+          <a:noFill/>
+          <a:ln/>
+        </p:spPr>
+        <p:txBody>
+          <a:bodyPr wrap="square" lIns="0" tIns="0" rIns="0" bIns="0" rtlCol="0" anchor="ctr">
+            <a:normAutofit/>
+          </a:bodyPr>
+          <a:lstStyle/>
+          <a:p>
+            <a:pPr indent="0" marL="0">
+              <a:buNone/>
+            </a:pPr>
+            <a:r>
+              <a:rPr lang="en-US" sz="1250" dirty="0">
+                <a:solidFill>
+                  <a:srgbClr val="5E6470"/>
+                </a:solidFill>
+              </a:rPr>
+              <a:t>Department of Statistics, National Taipei University  ·  hcchuang@gm.ntpu.edu.tw</a:t>
+            </a:r>
+            <a:endParaRPr lang="en-US" sz="1250" dirty="0"/>
+          </a:p>
+        </p:txBody>
+      </p:sp>
+      <p:sp>
+        <p:nvSpPr>
+          <p:cNvPr id="7" name="Shape 5"/>
+          <p:cNvSpPr/>
+          <p:nvPr/>
+        </p:nvSpPr>
+        <p:spPr>
+          <a:xfrm>
+            <a:off x="658368" y="3803904"/>
             <a:ext cx="1828800" cy="0"/>
           </a:xfrm>
           <a:prstGeom prst="line">
@@ -1940,14 +1978,14 @@
       </p:sp>
       <p:sp>
         <p:nvSpPr>
-          <p:cNvPr id="7" name="Text 5"/>
-          <p:cNvSpPr/>
-          <p:nvPr/>
-        </p:nvSpPr>
-        <p:spPr>
-          <a:xfrm>
-            <a:off x="658368" y="4023360"/>
-            <a:ext cx="8961120" cy="1097280"/>
+          <p:cNvPr id="8" name="Text 6"/>
+          <p:cNvSpPr/>
+          <p:nvPr/>
+        </p:nvSpPr>
+        <p:spPr>
+          <a:xfrm>
+            <a:off x="658368" y="4151376"/>
+            <a:ext cx="8961120" cy="987552"/>
           </a:xfrm>
           <a:prstGeom prst="rect">
             <a:avLst/>
@@ -1978,7 +2016,7 @@
       </p:sp>
       <p:sp>
         <p:nvSpPr>
-          <p:cNvPr id="8" name="Text 6"/>
+          <p:cNvPr id="9" name="Text 7"/>
           <p:cNvSpPr/>
           <p:nvPr/>
         </p:nvSpPr>
@@ -2167,7 +2205,48 @@
       </p:sp>
       <p:sp>
         <p:nvSpPr>
-          <p:cNvPr id="4" name="Shape 2"/>
+          <p:cNvPr id="4" name="Text 2"/>
+          <p:cNvSpPr/>
+          <p:nvPr/>
+        </p:nvSpPr>
+        <p:spPr>
+          <a:xfrm>
+            <a:off x="3749040" y="6254496"/>
+            <a:ext cx="7772400" cy="164592"/>
+          </a:xfrm>
+          <a:prstGeom prst="rect">
+            <a:avLst/>
+          </a:prstGeom>
+          <a:noFill/>
+          <a:ln/>
+        </p:spPr>
+        <p:txBody>
+          <a:bodyPr wrap="square" lIns="0" tIns="0" rIns="0" bIns="0" rtlCol="0" anchor="ctr">
+            <a:normAutofit/>
+          </a:bodyPr>
+          <a:lstStyle/>
+          <a:p>
+            <a:pPr algn="r" indent="0" marL="0">
+              <a:buNone/>
+            </a:pPr>
+            <a:r>
+              <a:rPr lang="en-US" sz="730" b="1" spc="35" kern="0" dirty="0">
+                <a:solidFill>
+                  <a:srgbClr val="5E6470"/>
+                </a:solidFill>
+                <a:latin typeface="Arial" pitchFamily="34" charset="0"/>
+                <a:ea typeface="Arial" pitchFamily="34" charset="-122"/>
+                <a:cs typeface="Arial" pitchFamily="34" charset="-120"/>
+              </a:rPr>
+              <a:t>HAWKISH BY VOICE: FINANCIAL MARKET REACTIONS TO FOMC COMMUNICATION  ·  HUI-CHING CHUANG</a:t>
+            </a:r>
+            <a:endParaRPr lang="en-US" sz="730" dirty="0"/>
+          </a:p>
+        </p:txBody>
+      </p:sp>
+      <p:sp>
+        <p:nvSpPr>
+          <p:cNvPr id="5" name="Shape 3"/>
           <p:cNvSpPr/>
           <p:nvPr/>
         </p:nvSpPr>
@@ -2194,7 +2273,7 @@
       </p:sp>
       <p:sp>
         <p:nvSpPr>
-          <p:cNvPr id="5" name="Text 3"/>
+          <p:cNvPr id="6" name="Text 4"/>
           <p:cNvSpPr/>
           <p:nvPr/>
         </p:nvSpPr>
@@ -2230,7 +2309,7 @@
       </p:sp>
       <p:sp>
         <p:nvSpPr>
-          <p:cNvPr id="6" name="Text 4"/>
+          <p:cNvPr id="7" name="Text 5"/>
           <p:cNvSpPr/>
           <p:nvPr/>
         </p:nvSpPr>
@@ -2268,7 +2347,7 @@
       </p:sp>
       <p:sp>
         <p:nvSpPr>
-          <p:cNvPr id="7" name="Text 5"/>
+          <p:cNvPr id="8" name="Text 6"/>
           <p:cNvSpPr/>
           <p:nvPr/>
         </p:nvSpPr>
@@ -2304,7 +2383,7 @@
       </p:sp>
       <p:sp>
         <p:nvSpPr>
-          <p:cNvPr id="8" name="Shape 6"/>
+          <p:cNvPr id="9" name="Shape 7"/>
           <p:cNvSpPr/>
           <p:nvPr/>
         </p:nvSpPr>
@@ -2329,7 +2408,7 @@
       </p:sp>
       <p:sp>
         <p:nvSpPr>
-          <p:cNvPr id="9" name="Shape 7"/>
+          <p:cNvPr id="10" name="Shape 8"/>
           <p:cNvSpPr/>
           <p:nvPr/>
         </p:nvSpPr>
@@ -2356,7 +2435,7 @@
       </p:sp>
       <p:sp>
         <p:nvSpPr>
-          <p:cNvPr id="10" name="Text 8"/>
+          <p:cNvPr id="11" name="Text 9"/>
           <p:cNvSpPr/>
           <p:nvPr/>
         </p:nvSpPr>
@@ -2392,7 +2471,7 @@
       </p:sp>
       <p:sp>
         <p:nvSpPr>
-          <p:cNvPr id="11" name="Text 9"/>
+          <p:cNvPr id="12" name="Text 10"/>
           <p:cNvSpPr/>
           <p:nvPr/>
         </p:nvSpPr>
@@ -2430,7 +2509,7 @@
       </p:sp>
       <p:sp>
         <p:nvSpPr>
-          <p:cNvPr id="12" name="Text 10"/>
+          <p:cNvPr id="13" name="Text 11"/>
           <p:cNvSpPr/>
           <p:nvPr/>
         </p:nvSpPr>
@@ -2468,7 +2547,7 @@
       </p:sp>
       <p:sp>
         <p:nvSpPr>
-          <p:cNvPr id="13" name="Text 11"/>
+          <p:cNvPr id="14" name="Text 12"/>
           <p:cNvSpPr/>
           <p:nvPr/>
         </p:nvSpPr>
@@ -2504,7 +2583,7 @@
       </p:sp>
       <p:sp>
         <p:nvSpPr>
-          <p:cNvPr id="14" name="Text 12"/>
+          <p:cNvPr id="15" name="Text 13"/>
           <p:cNvSpPr/>
           <p:nvPr/>
         </p:nvSpPr>
@@ -2698,7 +2777,48 @@
       </p:sp>
       <p:sp>
         <p:nvSpPr>
-          <p:cNvPr id="4" name="Shape 2"/>
+          <p:cNvPr id="4" name="Text 2"/>
+          <p:cNvSpPr/>
+          <p:nvPr/>
+        </p:nvSpPr>
+        <p:spPr>
+          <a:xfrm>
+            <a:off x="3749040" y="6254496"/>
+            <a:ext cx="7772400" cy="164592"/>
+          </a:xfrm>
+          <a:prstGeom prst="rect">
+            <a:avLst/>
+          </a:prstGeom>
+          <a:noFill/>
+          <a:ln/>
+        </p:spPr>
+        <p:txBody>
+          <a:bodyPr wrap="square" lIns="0" tIns="0" rIns="0" bIns="0" rtlCol="0" anchor="ctr">
+            <a:normAutofit/>
+          </a:bodyPr>
+          <a:lstStyle/>
+          <a:p>
+            <a:pPr algn="r" indent="0" marL="0">
+              <a:buNone/>
+            </a:pPr>
+            <a:r>
+              <a:rPr lang="en-US" sz="730" b="1" spc="35" kern="0" dirty="0">
+                <a:solidFill>
+                  <a:srgbClr val="5E6470"/>
+                </a:solidFill>
+                <a:latin typeface="Arial" pitchFamily="34" charset="0"/>
+                <a:ea typeface="Arial" pitchFamily="34" charset="-122"/>
+                <a:cs typeface="Arial" pitchFamily="34" charset="-120"/>
+              </a:rPr>
+              <a:t>HAWKISH BY VOICE: FINANCIAL MARKET REACTIONS TO FOMC COMMUNICATION  ·  HUI-CHING CHUANG</a:t>
+            </a:r>
+            <a:endParaRPr lang="en-US" sz="730" dirty="0"/>
+          </a:p>
+        </p:txBody>
+      </p:sp>
+      <p:sp>
+        <p:nvSpPr>
+          <p:cNvPr id="5" name="Shape 3"/>
           <p:cNvSpPr/>
           <p:nvPr/>
         </p:nvSpPr>
@@ -2723,7 +2843,7 @@
       </p:sp>
       <p:sp>
         <p:nvSpPr>
-          <p:cNvPr id="5" name="Shape 3"/>
+          <p:cNvPr id="6" name="Shape 4"/>
           <p:cNvSpPr/>
           <p:nvPr/>
         </p:nvSpPr>
@@ -2748,7 +2868,7 @@
       </p:sp>
       <p:sp>
         <p:nvSpPr>
-          <p:cNvPr id="6" name="Shape 4"/>
+          <p:cNvPr id="7" name="Shape 5"/>
           <p:cNvSpPr/>
           <p:nvPr/>
         </p:nvSpPr>
@@ -2773,7 +2893,7 @@
       </p:sp>
       <p:sp>
         <p:nvSpPr>
-          <p:cNvPr id="7" name="Shape 5"/>
+          <p:cNvPr id="8" name="Shape 6"/>
           <p:cNvSpPr/>
           <p:nvPr/>
         </p:nvSpPr>
@@ -2798,7 +2918,7 @@
       </p:sp>
       <p:sp>
         <p:nvSpPr>
-          <p:cNvPr id="8" name="Shape 6"/>
+          <p:cNvPr id="9" name="Shape 7"/>
           <p:cNvSpPr/>
           <p:nvPr/>
         </p:nvSpPr>
@@ -2825,7 +2945,7 @@
       </p:sp>
       <p:sp>
         <p:nvSpPr>
-          <p:cNvPr id="9" name="Text 7"/>
+          <p:cNvPr id="10" name="Text 8"/>
           <p:cNvSpPr/>
           <p:nvPr/>
         </p:nvSpPr>
@@ -2863,7 +2983,7 @@
       </p:sp>
       <p:sp>
         <p:nvSpPr>
-          <p:cNvPr id="10" name="Text 8"/>
+          <p:cNvPr id="11" name="Text 9"/>
           <p:cNvSpPr/>
           <p:nvPr/>
         </p:nvSpPr>
@@ -2901,7 +3021,7 @@
       </p:sp>
       <p:sp>
         <p:nvSpPr>
-          <p:cNvPr id="11" name="Shape 9"/>
+          <p:cNvPr id="12" name="Shape 10"/>
           <p:cNvSpPr/>
           <p:nvPr/>
         </p:nvSpPr>
@@ -2928,7 +3048,7 @@
       </p:sp>
       <p:sp>
         <p:nvSpPr>
-          <p:cNvPr id="12" name="Text 10"/>
+          <p:cNvPr id="13" name="Text 11"/>
           <p:cNvSpPr/>
           <p:nvPr/>
         </p:nvSpPr>
@@ -2966,7 +3086,7 @@
       </p:sp>
       <p:sp>
         <p:nvSpPr>
-          <p:cNvPr id="13" name="Text 11"/>
+          <p:cNvPr id="14" name="Text 12"/>
           <p:cNvSpPr/>
           <p:nvPr/>
         </p:nvSpPr>
@@ -3004,7 +3124,7 @@
       </p:sp>
       <p:sp>
         <p:nvSpPr>
-          <p:cNvPr id="14" name="Shape 12"/>
+          <p:cNvPr id="15" name="Shape 13"/>
           <p:cNvSpPr/>
           <p:nvPr/>
         </p:nvSpPr>
@@ -3031,7 +3151,7 @@
       </p:sp>
       <p:sp>
         <p:nvSpPr>
-          <p:cNvPr id="15" name="Text 13"/>
+          <p:cNvPr id="16" name="Text 14"/>
           <p:cNvSpPr/>
           <p:nvPr/>
         </p:nvSpPr>
@@ -3069,7 +3189,7 @@
       </p:sp>
       <p:sp>
         <p:nvSpPr>
-          <p:cNvPr id="16" name="Text 14"/>
+          <p:cNvPr id="17" name="Text 15"/>
           <p:cNvSpPr/>
           <p:nvPr/>
         </p:nvSpPr>
@@ -3107,7 +3227,7 @@
       </p:sp>
       <p:sp>
         <p:nvSpPr>
-          <p:cNvPr id="17" name="Shape 15"/>
+          <p:cNvPr id="18" name="Shape 16"/>
           <p:cNvSpPr/>
           <p:nvPr/>
         </p:nvSpPr>
@@ -3134,7 +3254,7 @@
       </p:sp>
       <p:sp>
         <p:nvSpPr>
-          <p:cNvPr id="18" name="Text 16"/>
+          <p:cNvPr id="19" name="Text 17"/>
           <p:cNvSpPr/>
           <p:nvPr/>
         </p:nvSpPr>
@@ -3172,7 +3292,7 @@
       </p:sp>
       <p:sp>
         <p:nvSpPr>
-          <p:cNvPr id="19" name="Text 17"/>
+          <p:cNvPr id="20" name="Text 18"/>
           <p:cNvSpPr/>
           <p:nvPr/>
         </p:nvSpPr>
@@ -3210,7 +3330,7 @@
       </p:sp>
       <p:sp>
         <p:nvSpPr>
-          <p:cNvPr id="20" name="Shape 18"/>
+          <p:cNvPr id="21" name="Shape 19"/>
           <p:cNvSpPr/>
           <p:nvPr/>
         </p:nvSpPr>
@@ -3237,7 +3357,7 @@
       </p:sp>
       <p:sp>
         <p:nvSpPr>
-          <p:cNvPr id="21" name="Text 19"/>
+          <p:cNvPr id="22" name="Text 20"/>
           <p:cNvSpPr/>
           <p:nvPr/>
         </p:nvSpPr>
@@ -3275,7 +3395,7 @@
       </p:sp>
       <p:sp>
         <p:nvSpPr>
-          <p:cNvPr id="22" name="Text 20"/>
+          <p:cNvPr id="23" name="Text 21"/>
           <p:cNvSpPr/>
           <p:nvPr/>
         </p:nvSpPr>
@@ -3313,7 +3433,7 @@
       </p:sp>
       <p:sp>
         <p:nvSpPr>
-          <p:cNvPr id="23" name="Shape 21"/>
+          <p:cNvPr id="24" name="Shape 22"/>
           <p:cNvSpPr/>
           <p:nvPr/>
         </p:nvSpPr>
@@ -3340,7 +3460,7 @@
       </p:sp>
       <p:sp>
         <p:nvSpPr>
-          <p:cNvPr id="24" name="Shape 22"/>
+          <p:cNvPr id="25" name="Shape 23"/>
           <p:cNvSpPr/>
           <p:nvPr/>
         </p:nvSpPr>
@@ -3365,7 +3485,7 @@
       </p:sp>
       <p:sp>
         <p:nvSpPr>
-          <p:cNvPr id="25" name="Text 23"/>
+          <p:cNvPr id="26" name="Text 24"/>
           <p:cNvSpPr/>
           <p:nvPr/>
         </p:nvSpPr>
@@ -3403,7 +3523,7 @@
       </p:sp>
       <p:sp>
         <p:nvSpPr>
-          <p:cNvPr id="26" name="Text 24"/>
+          <p:cNvPr id="27" name="Text 25"/>
           <p:cNvSpPr/>
           <p:nvPr/>
         </p:nvSpPr>
@@ -3441,7 +3561,7 @@
       </p:sp>
       <p:sp>
         <p:nvSpPr>
-          <p:cNvPr id="27" name="Shape 25"/>
+          <p:cNvPr id="28" name="Shape 26"/>
           <p:cNvSpPr/>
           <p:nvPr/>
         </p:nvSpPr>
@@ -3468,7 +3588,7 @@
       </p:sp>
       <p:sp>
         <p:nvSpPr>
-          <p:cNvPr id="28" name="Shape 26"/>
+          <p:cNvPr id="29" name="Shape 27"/>
           <p:cNvSpPr/>
           <p:nvPr/>
         </p:nvSpPr>
@@ -3493,7 +3613,7 @@
       </p:sp>
       <p:sp>
         <p:nvSpPr>
-          <p:cNvPr id="29" name="Text 27"/>
+          <p:cNvPr id="30" name="Text 28"/>
           <p:cNvSpPr/>
           <p:nvPr/>
         </p:nvSpPr>
@@ -3531,7 +3651,7 @@
       </p:sp>
       <p:sp>
         <p:nvSpPr>
-          <p:cNvPr id="30" name="Text 28"/>
+          <p:cNvPr id="31" name="Text 29"/>
           <p:cNvSpPr/>
           <p:nvPr/>
         </p:nvSpPr>
@@ -3569,7 +3689,7 @@
       </p:sp>
       <p:sp>
         <p:nvSpPr>
-          <p:cNvPr id="31" name="Text 29"/>
+          <p:cNvPr id="32" name="Text 30"/>
           <p:cNvSpPr/>
           <p:nvPr/>
         </p:nvSpPr>
@@ -3763,7 +3883,48 @@
       </p:sp>
       <p:sp>
         <p:nvSpPr>
-          <p:cNvPr id="4" name="Shape 2"/>
+          <p:cNvPr id="4" name="Text 2"/>
+          <p:cNvSpPr/>
+          <p:nvPr/>
+        </p:nvSpPr>
+        <p:spPr>
+          <a:xfrm>
+            <a:off x="3749040" y="6254496"/>
+            <a:ext cx="7772400" cy="164592"/>
+          </a:xfrm>
+          <a:prstGeom prst="rect">
+            <a:avLst/>
+          </a:prstGeom>
+          <a:noFill/>
+          <a:ln/>
+        </p:spPr>
+        <p:txBody>
+          <a:bodyPr wrap="square" lIns="0" tIns="0" rIns="0" bIns="0" rtlCol="0" anchor="ctr">
+            <a:normAutofit/>
+          </a:bodyPr>
+          <a:lstStyle/>
+          <a:p>
+            <a:pPr algn="r" indent="0" marL="0">
+              <a:buNone/>
+            </a:pPr>
+            <a:r>
+              <a:rPr lang="en-US" sz="730" b="1" spc="35" kern="0" dirty="0">
+                <a:solidFill>
+                  <a:srgbClr val="5E6470"/>
+                </a:solidFill>
+                <a:latin typeface="Arial" pitchFamily="34" charset="0"/>
+                <a:ea typeface="Arial" pitchFamily="34" charset="-122"/>
+                <a:cs typeface="Arial" pitchFamily="34" charset="-120"/>
+              </a:rPr>
+              <a:t>HAWKISH BY VOICE: FINANCIAL MARKET REACTIONS TO FOMC COMMUNICATION  ·  HUI-CHING CHUANG</a:t>
+            </a:r>
+            <a:endParaRPr lang="en-US" sz="730" dirty="0"/>
+          </a:p>
+        </p:txBody>
+      </p:sp>
+      <p:sp>
+        <p:nvSpPr>
+          <p:cNvPr id="5" name="Shape 3"/>
           <p:cNvSpPr/>
           <p:nvPr/>
         </p:nvSpPr>
@@ -3790,7 +3951,7 @@
       </p:sp>
       <p:sp>
         <p:nvSpPr>
-          <p:cNvPr id="5" name="Shape 3"/>
+          <p:cNvPr id="6" name="Shape 4"/>
           <p:cNvSpPr/>
           <p:nvPr/>
         </p:nvSpPr>
@@ -3815,7 +3976,7 @@
       </p:sp>
       <p:sp>
         <p:nvSpPr>
-          <p:cNvPr id="6" name="Text 4"/>
+          <p:cNvPr id="7" name="Text 5"/>
           <p:cNvSpPr/>
           <p:nvPr/>
         </p:nvSpPr>
@@ -3853,7 +4014,7 @@
       </p:sp>
       <p:sp>
         <p:nvSpPr>
-          <p:cNvPr id="7" name="Text 5"/>
+          <p:cNvPr id="8" name="Text 6"/>
           <p:cNvSpPr/>
           <p:nvPr/>
         </p:nvSpPr>
@@ -3891,7 +4052,7 @@
       </p:sp>
       <p:sp>
         <p:nvSpPr>
-          <p:cNvPr id="8" name="Shape 6"/>
+          <p:cNvPr id="9" name="Shape 7"/>
           <p:cNvSpPr/>
           <p:nvPr/>
         </p:nvSpPr>
@@ -3918,7 +4079,7 @@
       </p:sp>
       <p:sp>
         <p:nvSpPr>
-          <p:cNvPr id="9" name="Shape 7"/>
+          <p:cNvPr id="10" name="Shape 8"/>
           <p:cNvSpPr/>
           <p:nvPr/>
         </p:nvSpPr>
@@ -3943,7 +4104,7 @@
       </p:sp>
       <p:sp>
         <p:nvSpPr>
-          <p:cNvPr id="10" name="Text 8"/>
+          <p:cNvPr id="11" name="Text 9"/>
           <p:cNvSpPr/>
           <p:nvPr/>
         </p:nvSpPr>
@@ -3981,7 +4142,7 @@
       </p:sp>
       <p:sp>
         <p:nvSpPr>
-          <p:cNvPr id="11" name="Text 9"/>
+          <p:cNvPr id="12" name="Text 10"/>
           <p:cNvSpPr/>
           <p:nvPr/>
         </p:nvSpPr>
@@ -4019,7 +4180,7 @@
       </p:sp>
       <p:sp>
         <p:nvSpPr>
-          <p:cNvPr id="12" name="Shape 10"/>
+          <p:cNvPr id="13" name="Shape 11"/>
           <p:cNvSpPr/>
           <p:nvPr/>
         </p:nvSpPr>
@@ -4046,7 +4207,7 @@
       </p:sp>
       <p:sp>
         <p:nvSpPr>
-          <p:cNvPr id="13" name="Shape 11"/>
+          <p:cNvPr id="14" name="Shape 12"/>
           <p:cNvSpPr/>
           <p:nvPr/>
         </p:nvSpPr>
@@ -4071,7 +4232,7 @@
       </p:sp>
       <p:sp>
         <p:nvSpPr>
-          <p:cNvPr id="14" name="Text 12"/>
+          <p:cNvPr id="15" name="Text 13"/>
           <p:cNvSpPr/>
           <p:nvPr/>
         </p:nvSpPr>
@@ -4109,7 +4270,7 @@
       </p:sp>
       <p:sp>
         <p:nvSpPr>
-          <p:cNvPr id="15" name="Text 13"/>
+          <p:cNvPr id="16" name="Text 14"/>
           <p:cNvSpPr/>
           <p:nvPr/>
         </p:nvSpPr>
@@ -4147,7 +4308,7 @@
       </p:sp>
       <p:sp>
         <p:nvSpPr>
-          <p:cNvPr id="16" name="Shape 14"/>
+          <p:cNvPr id="17" name="Shape 15"/>
           <p:cNvSpPr/>
           <p:nvPr/>
         </p:nvSpPr>
@@ -4174,7 +4335,7 @@
       </p:sp>
       <p:sp>
         <p:nvSpPr>
-          <p:cNvPr id="17" name="Shape 15"/>
+          <p:cNvPr id="18" name="Shape 16"/>
           <p:cNvSpPr/>
           <p:nvPr/>
         </p:nvSpPr>
@@ -4199,7 +4360,7 @@
       </p:sp>
       <p:sp>
         <p:nvSpPr>
-          <p:cNvPr id="18" name="Text 16"/>
+          <p:cNvPr id="19" name="Text 17"/>
           <p:cNvSpPr/>
           <p:nvPr/>
         </p:nvSpPr>
@@ -4237,7 +4398,7 @@
       </p:sp>
       <p:sp>
         <p:nvSpPr>
-          <p:cNvPr id="19" name="Text 17"/>
+          <p:cNvPr id="20" name="Text 18"/>
           <p:cNvSpPr/>
           <p:nvPr/>
         </p:nvSpPr>
@@ -4275,7 +4436,7 @@
       </p:sp>
       <p:sp>
         <p:nvSpPr>
-          <p:cNvPr id="20" name="Text 18"/>
+          <p:cNvPr id="21" name="Text 19"/>
           <p:cNvSpPr/>
           <p:nvPr/>
         </p:nvSpPr>
@@ -4311,7 +4472,7 @@
       </p:sp>
       <p:sp>
         <p:nvSpPr>
-          <p:cNvPr id="21" name="Shape 19"/>
+          <p:cNvPr id="22" name="Shape 20"/>
           <p:cNvSpPr/>
           <p:nvPr/>
         </p:nvSpPr>
@@ -4338,7 +4499,7 @@
       </p:sp>
       <p:sp>
         <p:nvSpPr>
-          <p:cNvPr id="22" name="Shape 20"/>
+          <p:cNvPr id="23" name="Shape 21"/>
           <p:cNvSpPr/>
           <p:nvPr/>
         </p:nvSpPr>
@@ -4363,7 +4524,7 @@
       </p:sp>
       <p:sp>
         <p:nvSpPr>
-          <p:cNvPr id="23" name="Text 21"/>
+          <p:cNvPr id="24" name="Text 22"/>
           <p:cNvSpPr/>
           <p:nvPr/>
         </p:nvSpPr>
@@ -4401,7 +4562,7 @@
       </p:sp>
       <p:sp>
         <p:nvSpPr>
-          <p:cNvPr id="24" name="Text 22"/>
+          <p:cNvPr id="25" name="Text 23"/>
           <p:cNvSpPr/>
           <p:nvPr/>
         </p:nvSpPr>
@@ -4439,7 +4600,7 @@
       </p:sp>
       <p:sp>
         <p:nvSpPr>
-          <p:cNvPr id="25" name="Shape 23"/>
+          <p:cNvPr id="26" name="Shape 24"/>
           <p:cNvSpPr/>
           <p:nvPr/>
         </p:nvSpPr>
@@ -4466,7 +4627,7 @@
       </p:sp>
       <p:sp>
         <p:nvSpPr>
-          <p:cNvPr id="26" name="Shape 24"/>
+          <p:cNvPr id="27" name="Shape 25"/>
           <p:cNvSpPr/>
           <p:nvPr/>
         </p:nvSpPr>
@@ -4491,7 +4652,7 @@
       </p:sp>
       <p:sp>
         <p:nvSpPr>
-          <p:cNvPr id="27" name="Text 25"/>
+          <p:cNvPr id="28" name="Text 26"/>
           <p:cNvSpPr/>
           <p:nvPr/>
         </p:nvSpPr>
@@ -4529,7 +4690,7 @@
       </p:sp>
       <p:sp>
         <p:nvSpPr>
-          <p:cNvPr id="28" name="Text 26"/>
+          <p:cNvPr id="29" name="Text 27"/>
           <p:cNvSpPr/>
           <p:nvPr/>
         </p:nvSpPr>
@@ -4567,7 +4728,7 @@
       </p:sp>
       <p:sp>
         <p:nvSpPr>
-          <p:cNvPr id="29" name="Shape 27"/>
+          <p:cNvPr id="30" name="Shape 28"/>
           <p:cNvSpPr/>
           <p:nvPr/>
         </p:nvSpPr>
@@ -4594,7 +4755,7 @@
       </p:sp>
       <p:sp>
         <p:nvSpPr>
-          <p:cNvPr id="30" name="Shape 28"/>
+          <p:cNvPr id="31" name="Shape 29"/>
           <p:cNvSpPr/>
           <p:nvPr/>
         </p:nvSpPr>
@@ -4619,7 +4780,7 @@
       </p:sp>
       <p:sp>
         <p:nvSpPr>
-          <p:cNvPr id="31" name="Text 29"/>
+          <p:cNvPr id="32" name="Text 30"/>
           <p:cNvSpPr/>
           <p:nvPr/>
         </p:nvSpPr>
@@ -4657,7 +4818,7 @@
       </p:sp>
       <p:sp>
         <p:nvSpPr>
-          <p:cNvPr id="32" name="Text 30"/>
+          <p:cNvPr id="33" name="Text 31"/>
           <p:cNvSpPr/>
           <p:nvPr/>
         </p:nvSpPr>
@@ -4695,7 +4856,7 @@
       </p:sp>
       <p:sp>
         <p:nvSpPr>
-          <p:cNvPr id="33" name="Text 31"/>
+          <p:cNvPr id="34" name="Text 32"/>
           <p:cNvSpPr/>
           <p:nvPr/>
         </p:nvSpPr>
@@ -4895,6 +5056,47 @@
         </p:nvSpPr>
         <p:spPr>
           <a:xfrm>
+            <a:off x="3749040" y="6254496"/>
+            <a:ext cx="7772400" cy="164592"/>
+          </a:xfrm>
+          <a:prstGeom prst="rect">
+            <a:avLst/>
+          </a:prstGeom>
+          <a:noFill/>
+          <a:ln/>
+        </p:spPr>
+        <p:txBody>
+          <a:bodyPr wrap="square" lIns="0" tIns="0" rIns="0" bIns="0" rtlCol="0" anchor="ctr">
+            <a:normAutofit/>
+          </a:bodyPr>
+          <a:lstStyle/>
+          <a:p>
+            <a:pPr algn="r" indent="0" marL="0">
+              <a:buNone/>
+            </a:pPr>
+            <a:r>
+              <a:rPr lang="en-US" sz="730" b="1" spc="35" kern="0" dirty="0">
+                <a:solidFill>
+                  <a:srgbClr val="5E6470"/>
+                </a:solidFill>
+                <a:latin typeface="Arial" pitchFamily="34" charset="0"/>
+                <a:ea typeface="Arial" pitchFamily="34" charset="-122"/>
+                <a:cs typeface="Arial" pitchFamily="34" charset="-120"/>
+              </a:rPr>
+              <a:t>HAWKISH BY VOICE: FINANCIAL MARKET REACTIONS TO FOMC COMMUNICATION  ·  HUI-CHING CHUANG</a:t>
+            </a:r>
+            <a:endParaRPr lang="en-US" sz="730" dirty="0"/>
+          </a:p>
+        </p:txBody>
+      </p:sp>
+      <p:sp>
+        <p:nvSpPr>
+          <p:cNvPr id="5" name="Text 3"/>
+          <p:cNvSpPr/>
+          <p:nvPr/>
+        </p:nvSpPr>
+        <p:spPr>
+          <a:xfrm>
             <a:off x="685800" y="1481328"/>
             <a:ext cx="5074920" cy="320040"/>
           </a:xfrm>
@@ -4925,7 +5127,7 @@
       </p:sp>
       <p:sp>
         <p:nvSpPr>
-          <p:cNvPr id="5" name="Text 3"/>
+          <p:cNvPr id="6" name="Text 4"/>
           <p:cNvSpPr/>
           <p:nvPr/>
         </p:nvSpPr>
@@ -4961,7 +5163,7 @@
       </p:sp>
       <p:sp>
         <p:nvSpPr>
-          <p:cNvPr id="6" name="Shape 4"/>
+          <p:cNvPr id="7" name="Shape 5"/>
           <p:cNvSpPr/>
           <p:nvPr/>
         </p:nvSpPr>
@@ -4988,7 +5190,7 @@
       </p:sp>
       <p:sp>
         <p:nvSpPr>
-          <p:cNvPr id="7" name="Text 5"/>
+          <p:cNvPr id="8" name="Text 6"/>
           <p:cNvSpPr/>
           <p:nvPr/>
         </p:nvSpPr>
@@ -5024,7 +5226,7 @@
       </p:sp>
       <p:sp>
         <p:nvSpPr>
-          <p:cNvPr id="8" name="Shape 6"/>
+          <p:cNvPr id="9" name="Shape 7"/>
           <p:cNvSpPr/>
           <p:nvPr/>
         </p:nvSpPr>
@@ -5049,7 +5251,7 @@
       </p:sp>
       <p:sp>
         <p:nvSpPr>
-          <p:cNvPr id="9" name="Text 7"/>
+          <p:cNvPr id="10" name="Text 8"/>
           <p:cNvSpPr/>
           <p:nvPr/>
         </p:nvSpPr>
@@ -5085,7 +5287,7 @@
       </p:sp>
       <p:sp>
         <p:nvSpPr>
-          <p:cNvPr id="10" name="Text 8"/>
+          <p:cNvPr id="11" name="Text 9"/>
           <p:cNvSpPr/>
           <p:nvPr/>
         </p:nvSpPr>
@@ -5121,7 +5323,7 @@
       </p:sp>
       <p:sp>
         <p:nvSpPr>
-          <p:cNvPr id="11" name="Shape 9"/>
+          <p:cNvPr id="12" name="Shape 10"/>
           <p:cNvSpPr/>
           <p:nvPr/>
         </p:nvSpPr>
@@ -5146,7 +5348,7 @@
       </p:sp>
       <p:sp>
         <p:nvSpPr>
-          <p:cNvPr id="12" name="Text 10"/>
+          <p:cNvPr id="13" name="Text 11"/>
           <p:cNvSpPr/>
           <p:nvPr/>
         </p:nvSpPr>
@@ -5182,7 +5384,7 @@
       </p:sp>
       <p:sp>
         <p:nvSpPr>
-          <p:cNvPr id="13" name="Text 11"/>
+          <p:cNvPr id="14" name="Text 12"/>
           <p:cNvSpPr/>
           <p:nvPr/>
         </p:nvSpPr>
@@ -5218,7 +5420,7 @@
       </p:sp>
       <p:sp>
         <p:nvSpPr>
-          <p:cNvPr id="14" name="Text 12"/>
+          <p:cNvPr id="15" name="Text 13"/>
           <p:cNvSpPr/>
           <p:nvPr/>
         </p:nvSpPr>
@@ -5254,7 +5456,7 @@
       </p:sp>
       <p:sp>
         <p:nvSpPr>
-          <p:cNvPr id="15" name="Shape 13"/>
+          <p:cNvPr id="16" name="Shape 14"/>
           <p:cNvSpPr/>
           <p:nvPr/>
         </p:nvSpPr>
@@ -5281,7 +5483,7 @@
       </p:sp>
       <p:sp>
         <p:nvSpPr>
-          <p:cNvPr id="16" name="Text 14"/>
+          <p:cNvPr id="17" name="Text 15"/>
           <p:cNvSpPr/>
           <p:nvPr/>
         </p:nvSpPr>
@@ -5317,7 +5519,7 @@
       </p:sp>
       <p:sp>
         <p:nvSpPr>
-          <p:cNvPr id="17" name="Shape 15"/>
+          <p:cNvPr id="18" name="Shape 16"/>
           <p:cNvSpPr/>
           <p:nvPr/>
         </p:nvSpPr>
@@ -5342,7 +5544,7 @@
       </p:sp>
       <p:sp>
         <p:nvSpPr>
-          <p:cNvPr id="18" name="Text 16"/>
+          <p:cNvPr id="19" name="Text 17"/>
           <p:cNvSpPr/>
           <p:nvPr/>
         </p:nvSpPr>
@@ -5378,7 +5580,7 @@
       </p:sp>
       <p:sp>
         <p:nvSpPr>
-          <p:cNvPr id="19" name="Text 17"/>
+          <p:cNvPr id="20" name="Text 18"/>
           <p:cNvSpPr/>
           <p:nvPr/>
         </p:nvSpPr>
@@ -5414,7 +5616,7 @@
       </p:sp>
       <p:sp>
         <p:nvSpPr>
-          <p:cNvPr id="20" name="Shape 18"/>
+          <p:cNvPr id="21" name="Shape 19"/>
           <p:cNvSpPr/>
           <p:nvPr/>
         </p:nvSpPr>
@@ -5439,7 +5641,7 @@
       </p:sp>
       <p:sp>
         <p:nvSpPr>
-          <p:cNvPr id="21" name="Text 19"/>
+          <p:cNvPr id="22" name="Text 20"/>
           <p:cNvSpPr/>
           <p:nvPr/>
         </p:nvSpPr>
@@ -5475,7 +5677,7 @@
       </p:sp>
       <p:sp>
         <p:nvSpPr>
-          <p:cNvPr id="22" name="Text 20"/>
+          <p:cNvPr id="23" name="Text 21"/>
           <p:cNvSpPr/>
           <p:nvPr/>
         </p:nvSpPr>
@@ -5511,7 +5713,7 @@
       </p:sp>
       <p:sp>
         <p:nvSpPr>
-          <p:cNvPr id="23" name="Text 21"/>
+          <p:cNvPr id="24" name="Text 22"/>
           <p:cNvSpPr/>
           <p:nvPr/>
         </p:nvSpPr>
@@ -5547,7 +5749,7 @@
       </p:sp>
       <p:sp>
         <p:nvSpPr>
-          <p:cNvPr id="24" name="Text 22"/>
+          <p:cNvPr id="25" name="Text 23"/>
           <p:cNvSpPr/>
           <p:nvPr/>
         </p:nvSpPr>
@@ -5741,7 +5943,48 @@
       </p:sp>
       <p:sp>
         <p:nvSpPr>
-          <p:cNvPr id="4" name="Shape 2"/>
+          <p:cNvPr id="4" name="Text 2"/>
+          <p:cNvSpPr/>
+          <p:nvPr/>
+        </p:nvSpPr>
+        <p:spPr>
+          <a:xfrm>
+            <a:off x="3749040" y="6254496"/>
+            <a:ext cx="7772400" cy="164592"/>
+          </a:xfrm>
+          <a:prstGeom prst="rect">
+            <a:avLst/>
+          </a:prstGeom>
+          <a:noFill/>
+          <a:ln/>
+        </p:spPr>
+        <p:txBody>
+          <a:bodyPr wrap="square" lIns="0" tIns="0" rIns="0" bIns="0" rtlCol="0" anchor="ctr">
+            <a:normAutofit/>
+          </a:bodyPr>
+          <a:lstStyle/>
+          <a:p>
+            <a:pPr algn="r" indent="0" marL="0">
+              <a:buNone/>
+            </a:pPr>
+            <a:r>
+              <a:rPr lang="en-US" sz="730" b="1" spc="35" kern="0" dirty="0">
+                <a:solidFill>
+                  <a:srgbClr val="5E6470"/>
+                </a:solidFill>
+                <a:latin typeface="Arial" pitchFamily="34" charset="0"/>
+                <a:ea typeface="Arial" pitchFamily="34" charset="-122"/>
+                <a:cs typeface="Arial" pitchFamily="34" charset="-120"/>
+              </a:rPr>
+              <a:t>HAWKISH BY VOICE: FINANCIAL MARKET REACTIONS TO FOMC COMMUNICATION  ·  HUI-CHING CHUANG</a:t>
+            </a:r>
+            <a:endParaRPr lang="en-US" sz="730" dirty="0"/>
+          </a:p>
+        </p:txBody>
+      </p:sp>
+      <p:sp>
+        <p:nvSpPr>
+          <p:cNvPr id="5" name="Shape 3"/>
           <p:cNvSpPr/>
           <p:nvPr/>
         </p:nvSpPr>
@@ -5764,7 +6007,7 @@
       </p:sp>
       <p:sp>
         <p:nvSpPr>
-          <p:cNvPr id="5" name="Shape 3"/>
+          <p:cNvPr id="6" name="Shape 4"/>
           <p:cNvSpPr/>
           <p:nvPr/>
         </p:nvSpPr>
@@ -5787,7 +6030,7 @@
       </p:sp>
       <p:sp>
         <p:nvSpPr>
-          <p:cNvPr id="6" name="Text 4"/>
+          <p:cNvPr id="7" name="Text 5"/>
           <p:cNvSpPr/>
           <p:nvPr/>
         </p:nvSpPr>
@@ -5823,7 +6066,7 @@
       </p:sp>
       <p:sp>
         <p:nvSpPr>
-          <p:cNvPr id="7" name="Shape 5"/>
+          <p:cNvPr id="8" name="Shape 6"/>
           <p:cNvSpPr/>
           <p:nvPr/>
         </p:nvSpPr>
@@ -5846,7 +6089,7 @@
       </p:sp>
       <p:sp>
         <p:nvSpPr>
-          <p:cNvPr id="8" name="Text 6"/>
+          <p:cNvPr id="9" name="Text 7"/>
           <p:cNvSpPr/>
           <p:nvPr/>
         </p:nvSpPr>
@@ -5882,7 +6125,7 @@
       </p:sp>
       <p:sp>
         <p:nvSpPr>
-          <p:cNvPr id="9" name="Shape 7"/>
+          <p:cNvPr id="10" name="Shape 8"/>
           <p:cNvSpPr/>
           <p:nvPr/>
         </p:nvSpPr>
@@ -5905,7 +6148,7 @@
       </p:sp>
       <p:sp>
         <p:nvSpPr>
-          <p:cNvPr id="10" name="Text 8"/>
+          <p:cNvPr id="11" name="Text 9"/>
           <p:cNvSpPr/>
           <p:nvPr/>
         </p:nvSpPr>
@@ -5941,7 +6184,7 @@
       </p:sp>
       <p:sp>
         <p:nvSpPr>
-          <p:cNvPr id="11" name="Shape 9"/>
+          <p:cNvPr id="12" name="Shape 10"/>
           <p:cNvSpPr/>
           <p:nvPr/>
         </p:nvSpPr>
@@ -5964,7 +6207,7 @@
       </p:sp>
       <p:sp>
         <p:nvSpPr>
-          <p:cNvPr id="12" name="Text 10"/>
+          <p:cNvPr id="13" name="Text 11"/>
           <p:cNvSpPr/>
           <p:nvPr/>
         </p:nvSpPr>
@@ -6000,7 +6243,7 @@
       </p:sp>
       <p:sp>
         <p:nvSpPr>
-          <p:cNvPr id="13" name="Shape 11"/>
+          <p:cNvPr id="14" name="Shape 12"/>
           <p:cNvSpPr/>
           <p:nvPr/>
         </p:nvSpPr>
@@ -6025,7 +6268,7 @@
       </p:sp>
       <p:sp>
         <p:nvSpPr>
-          <p:cNvPr id="14" name="Text 12"/>
+          <p:cNvPr id="15" name="Text 13"/>
           <p:cNvSpPr/>
           <p:nvPr/>
         </p:nvSpPr>
@@ -6061,7 +6304,7 @@
       </p:sp>
       <p:sp>
         <p:nvSpPr>
-          <p:cNvPr id="15" name="Text 13"/>
+          <p:cNvPr id="16" name="Text 14"/>
           <p:cNvSpPr/>
           <p:nvPr/>
         </p:nvSpPr>
@@ -6097,7 +6340,7 @@
       </p:sp>
       <p:sp>
         <p:nvSpPr>
-          <p:cNvPr id="16" name="Shape 14"/>
+          <p:cNvPr id="17" name="Shape 15"/>
           <p:cNvSpPr/>
           <p:nvPr/>
         </p:nvSpPr>
@@ -6122,7 +6365,7 @@
       </p:sp>
       <p:sp>
         <p:nvSpPr>
-          <p:cNvPr id="17" name="Text 15"/>
+          <p:cNvPr id="18" name="Text 16"/>
           <p:cNvSpPr/>
           <p:nvPr/>
         </p:nvSpPr>
@@ -6158,7 +6401,7 @@
       </p:sp>
       <p:sp>
         <p:nvSpPr>
-          <p:cNvPr id="18" name="Text 16"/>
+          <p:cNvPr id="19" name="Text 17"/>
           <p:cNvSpPr/>
           <p:nvPr/>
         </p:nvSpPr>
@@ -6194,7 +6437,7 @@
       </p:sp>
       <p:sp>
         <p:nvSpPr>
-          <p:cNvPr id="19" name="Shape 17"/>
+          <p:cNvPr id="20" name="Shape 18"/>
           <p:cNvSpPr/>
           <p:nvPr/>
         </p:nvSpPr>
@@ -6219,7 +6462,7 @@
       </p:sp>
       <p:sp>
         <p:nvSpPr>
-          <p:cNvPr id="20" name="Text 18"/>
+          <p:cNvPr id="21" name="Text 19"/>
           <p:cNvSpPr/>
           <p:nvPr/>
         </p:nvSpPr>
@@ -6255,7 +6498,7 @@
       </p:sp>
       <p:sp>
         <p:nvSpPr>
-          <p:cNvPr id="21" name="Text 19"/>
+          <p:cNvPr id="22" name="Text 20"/>
           <p:cNvSpPr/>
           <p:nvPr/>
         </p:nvSpPr>
@@ -6291,7 +6534,7 @@
       </p:sp>
       <p:sp>
         <p:nvSpPr>
-          <p:cNvPr id="22" name="Shape 20"/>
+          <p:cNvPr id="23" name="Shape 21"/>
           <p:cNvSpPr/>
           <p:nvPr/>
         </p:nvSpPr>
@@ -6316,7 +6559,7 @@
       </p:sp>
       <p:sp>
         <p:nvSpPr>
-          <p:cNvPr id="23" name="Text 21"/>
+          <p:cNvPr id="24" name="Text 22"/>
           <p:cNvSpPr/>
           <p:nvPr/>
         </p:nvSpPr>
@@ -6352,7 +6595,7 @@
       </p:sp>
       <p:sp>
         <p:nvSpPr>
-          <p:cNvPr id="24" name="Text 22"/>
+          <p:cNvPr id="25" name="Text 23"/>
           <p:cNvSpPr/>
           <p:nvPr/>
         </p:nvSpPr>
@@ -6388,7 +6631,7 @@
       </p:sp>
       <p:sp>
         <p:nvSpPr>
-          <p:cNvPr id="25" name="Shape 23"/>
+          <p:cNvPr id="26" name="Shape 24"/>
           <p:cNvSpPr/>
           <p:nvPr/>
         </p:nvSpPr>
@@ -6415,7 +6658,7 @@
       </p:sp>
       <p:sp>
         <p:nvSpPr>
-          <p:cNvPr id="26" name="Text 24"/>
+          <p:cNvPr id="27" name="Text 25"/>
           <p:cNvSpPr/>
           <p:nvPr/>
         </p:nvSpPr>
@@ -6453,7 +6696,7 @@
       </p:sp>
       <p:sp>
         <p:nvSpPr>
-          <p:cNvPr id="27" name="Text 25"/>
+          <p:cNvPr id="28" name="Text 26"/>
           <p:cNvSpPr/>
           <p:nvPr/>
         </p:nvSpPr>
@@ -6491,7 +6734,7 @@
       </p:sp>
       <p:sp>
         <p:nvSpPr>
-          <p:cNvPr id="28" name="Text 26"/>
+          <p:cNvPr id="29" name="Text 27"/>
           <p:cNvSpPr/>
           <p:nvPr/>
         </p:nvSpPr>
@@ -6683,9 +6926,50 @@
           </a:p>
         </p:txBody>
       </p:sp>
+      <p:sp>
+        <p:nvSpPr>
+          <p:cNvPr id="4" name="Text 2"/>
+          <p:cNvSpPr/>
+          <p:nvPr/>
+        </p:nvSpPr>
+        <p:spPr>
+          <a:xfrm>
+            <a:off x="3749040" y="6254496"/>
+            <a:ext cx="7772400" cy="164592"/>
+          </a:xfrm>
+          <a:prstGeom prst="rect">
+            <a:avLst/>
+          </a:prstGeom>
+          <a:noFill/>
+          <a:ln/>
+        </p:spPr>
+        <p:txBody>
+          <a:bodyPr wrap="square" lIns="0" tIns="0" rIns="0" bIns="0" rtlCol="0" anchor="ctr">
+            <a:normAutofit/>
+          </a:bodyPr>
+          <a:lstStyle/>
+          <a:p>
+            <a:pPr algn="r" indent="0" marL="0">
+              <a:buNone/>
+            </a:pPr>
+            <a:r>
+              <a:rPr lang="en-US" sz="730" b="1" spc="35" kern="0" dirty="0">
+                <a:solidFill>
+                  <a:srgbClr val="5E6470"/>
+                </a:solidFill>
+                <a:latin typeface="Arial" pitchFamily="34" charset="0"/>
+                <a:ea typeface="Arial" pitchFamily="34" charset="-122"/>
+                <a:cs typeface="Arial" pitchFamily="34" charset="-120"/>
+              </a:rPr>
+              <a:t>HAWKISH BY VOICE: FINANCIAL MARKET REACTIONS TO FOMC COMMUNICATION  ·  HUI-CHING CHUANG</a:t>
+            </a:r>
+            <a:endParaRPr lang="en-US" sz="730" dirty="0"/>
+          </a:p>
+        </p:txBody>
+      </p:sp>
       <p:pic>
         <p:nvPicPr>
-          <p:cNvPr id="4" name="Image 0" descr="C:\Dropbox\Apps\Overleaf\FOMCVoice\figures\fig06_qa_ds_heatmap.png">    </p:cNvPr>
+          <p:cNvPr id="5" name="Image 0" descr="C:\Dropbox\Apps\Overleaf\FOMCVoice\figures\fig06_qa_ds_heatmap.png">    </p:cNvPr>
           <p:cNvPicPr>
             <a:picLocks noChangeAspect="1"/>
           </p:cNvPicPr>
@@ -6709,7 +6993,7 @@
       </p:pic>
       <p:sp>
         <p:nvSpPr>
-          <p:cNvPr id="5" name="Shape 2"/>
+          <p:cNvPr id="6" name="Shape 3"/>
           <p:cNvSpPr/>
           <p:nvPr/>
         </p:nvSpPr>
@@ -6736,7 +7020,7 @@
       </p:sp>
       <p:sp>
         <p:nvSpPr>
-          <p:cNvPr id="6" name="Shape 3"/>
+          <p:cNvPr id="7" name="Shape 4"/>
           <p:cNvSpPr/>
           <p:nvPr/>
         </p:nvSpPr>
@@ -6763,7 +7047,7 @@
       </p:sp>
       <p:sp>
         <p:nvSpPr>
-          <p:cNvPr id="7" name="Shape 4"/>
+          <p:cNvPr id="8" name="Shape 5"/>
           <p:cNvSpPr/>
           <p:nvPr/>
         </p:nvSpPr>
@@ -6788,7 +7072,7 @@
       </p:sp>
       <p:sp>
         <p:nvSpPr>
-          <p:cNvPr id="8" name="Text 5"/>
+          <p:cNvPr id="9" name="Text 6"/>
           <p:cNvSpPr/>
           <p:nvPr/>
         </p:nvSpPr>
@@ -6826,7 +7110,7 @@
       </p:sp>
       <p:sp>
         <p:nvSpPr>
-          <p:cNvPr id="9" name="Text 6"/>
+          <p:cNvPr id="10" name="Text 7"/>
           <p:cNvSpPr/>
           <p:nvPr/>
         </p:nvSpPr>
@@ -6864,7 +7148,7 @@
       </p:sp>
       <p:sp>
         <p:nvSpPr>
-          <p:cNvPr id="10" name="Shape 7"/>
+          <p:cNvPr id="11" name="Shape 8"/>
           <p:cNvSpPr/>
           <p:nvPr/>
         </p:nvSpPr>
@@ -6891,7 +7175,7 @@
       </p:sp>
       <p:sp>
         <p:nvSpPr>
-          <p:cNvPr id="11" name="Shape 8"/>
+          <p:cNvPr id="12" name="Shape 9"/>
           <p:cNvSpPr/>
           <p:nvPr/>
         </p:nvSpPr>
@@ -6916,7 +7200,7 @@
       </p:sp>
       <p:sp>
         <p:nvSpPr>
-          <p:cNvPr id="12" name="Text 9"/>
+          <p:cNvPr id="13" name="Text 10"/>
           <p:cNvSpPr/>
           <p:nvPr/>
         </p:nvSpPr>
@@ -6954,7 +7238,7 @@
       </p:sp>
       <p:sp>
         <p:nvSpPr>
-          <p:cNvPr id="13" name="Text 10"/>
+          <p:cNvPr id="14" name="Text 11"/>
           <p:cNvSpPr/>
           <p:nvPr/>
         </p:nvSpPr>
@@ -6992,7 +7276,7 @@
       </p:sp>
       <p:sp>
         <p:nvSpPr>
-          <p:cNvPr id="14" name="Shape 11"/>
+          <p:cNvPr id="15" name="Shape 12"/>
           <p:cNvSpPr/>
           <p:nvPr/>
         </p:nvSpPr>
@@ -7019,7 +7303,7 @@
       </p:sp>
       <p:sp>
         <p:nvSpPr>
-          <p:cNvPr id="15" name="Shape 12"/>
+          <p:cNvPr id="16" name="Shape 13"/>
           <p:cNvSpPr/>
           <p:nvPr/>
         </p:nvSpPr>
@@ -7044,7 +7328,7 @@
       </p:sp>
       <p:sp>
         <p:nvSpPr>
-          <p:cNvPr id="16" name="Text 13"/>
+          <p:cNvPr id="17" name="Text 14"/>
           <p:cNvSpPr/>
           <p:nvPr/>
         </p:nvSpPr>
@@ -7082,7 +7366,7 @@
       </p:sp>
       <p:sp>
         <p:nvSpPr>
-          <p:cNvPr id="17" name="Text 14"/>
+          <p:cNvPr id="18" name="Text 15"/>
           <p:cNvSpPr/>
           <p:nvPr/>
         </p:nvSpPr>
@@ -7120,7 +7404,7 @@
       </p:sp>
       <p:sp>
         <p:nvSpPr>
-          <p:cNvPr id="18" name="Text 15"/>
+          <p:cNvPr id="19" name="Text 16"/>
           <p:cNvSpPr/>
           <p:nvPr/>
         </p:nvSpPr>
@@ -7312,9 +7596,50 @@
           </a:p>
         </p:txBody>
       </p:sp>
+      <p:sp>
+        <p:nvSpPr>
+          <p:cNvPr id="4" name="Text 2"/>
+          <p:cNvSpPr/>
+          <p:nvPr/>
+        </p:nvSpPr>
+        <p:spPr>
+          <a:xfrm>
+            <a:off x="3749040" y="6254496"/>
+            <a:ext cx="7772400" cy="164592"/>
+          </a:xfrm>
+          <a:prstGeom prst="rect">
+            <a:avLst/>
+          </a:prstGeom>
+          <a:noFill/>
+          <a:ln/>
+        </p:spPr>
+        <p:txBody>
+          <a:bodyPr wrap="square" lIns="0" tIns="0" rIns="0" bIns="0" rtlCol="0" anchor="ctr">
+            <a:normAutofit/>
+          </a:bodyPr>
+          <a:lstStyle/>
+          <a:p>
+            <a:pPr algn="r" indent="0" marL="0">
+              <a:buNone/>
+            </a:pPr>
+            <a:r>
+              <a:rPr lang="en-US" sz="730" b="1" spc="35" kern="0" dirty="0">
+                <a:solidFill>
+                  <a:srgbClr val="5E6470"/>
+                </a:solidFill>
+                <a:latin typeface="Arial" pitchFamily="34" charset="0"/>
+                <a:ea typeface="Arial" pitchFamily="34" charset="-122"/>
+                <a:cs typeface="Arial" pitchFamily="34" charset="-120"/>
+              </a:rPr>
+              <a:t>HAWKISH BY VOICE: FINANCIAL MARKET REACTIONS TO FOMC COMMUNICATION  ·  HUI-CHING CHUANG</a:t>
+            </a:r>
+            <a:endParaRPr lang="en-US" sz="730" dirty="0"/>
+          </a:p>
+        </p:txBody>
+      </p:sp>
       <p:pic>
         <p:nvPicPr>
-          <p:cNvPr id="4" name="Image 0" descr="C:\Dropbox\Apps\Overleaf\FOMCVoice\figures\fig07_qa_dsepu_heatmap.png">    </p:cNvPr>
+          <p:cNvPr id="5" name="Image 0" descr="C:\Dropbox\Apps\Overleaf\FOMCVoice\figures\fig07_qa_dsepu_heatmap.png">    </p:cNvPr>
           <p:cNvPicPr>
             <a:picLocks noChangeAspect="1"/>
           </p:cNvPicPr>
@@ -7338,7 +7663,7 @@
       </p:pic>
       <p:sp>
         <p:nvSpPr>
-          <p:cNvPr id="5" name="Shape 2"/>
+          <p:cNvPr id="6" name="Shape 3"/>
           <p:cNvSpPr/>
           <p:nvPr/>
         </p:nvSpPr>
@@ -7365,7 +7690,7 @@
       </p:sp>
       <p:sp>
         <p:nvSpPr>
-          <p:cNvPr id="6" name="Shape 3"/>
+          <p:cNvPr id="7" name="Shape 4"/>
           <p:cNvSpPr/>
           <p:nvPr/>
         </p:nvSpPr>
@@ -7392,7 +7717,7 @@
       </p:sp>
       <p:sp>
         <p:nvSpPr>
-          <p:cNvPr id="7" name="Shape 4"/>
+          <p:cNvPr id="8" name="Shape 5"/>
           <p:cNvSpPr/>
           <p:nvPr/>
         </p:nvSpPr>
@@ -7417,7 +7742,7 @@
       </p:sp>
       <p:sp>
         <p:nvSpPr>
-          <p:cNvPr id="8" name="Text 5"/>
+          <p:cNvPr id="9" name="Text 6"/>
           <p:cNvSpPr/>
           <p:nvPr/>
         </p:nvSpPr>
@@ -7455,7 +7780,7 @@
       </p:sp>
       <p:sp>
         <p:nvSpPr>
-          <p:cNvPr id="9" name="Text 6"/>
+          <p:cNvPr id="10" name="Text 7"/>
           <p:cNvSpPr/>
           <p:nvPr/>
         </p:nvSpPr>
@@ -7493,7 +7818,7 @@
       </p:sp>
       <p:sp>
         <p:nvSpPr>
-          <p:cNvPr id="10" name="Shape 7"/>
+          <p:cNvPr id="11" name="Shape 8"/>
           <p:cNvSpPr/>
           <p:nvPr/>
         </p:nvSpPr>
@@ -7520,7 +7845,7 @@
       </p:sp>
       <p:sp>
         <p:nvSpPr>
-          <p:cNvPr id="11" name="Shape 8"/>
+          <p:cNvPr id="12" name="Shape 9"/>
           <p:cNvSpPr/>
           <p:nvPr/>
         </p:nvSpPr>
@@ -7545,7 +7870,7 @@
       </p:sp>
       <p:sp>
         <p:nvSpPr>
-          <p:cNvPr id="12" name="Text 9"/>
+          <p:cNvPr id="13" name="Text 10"/>
           <p:cNvSpPr/>
           <p:nvPr/>
         </p:nvSpPr>
@@ -7583,7 +7908,7 @@
       </p:sp>
       <p:sp>
         <p:nvSpPr>
-          <p:cNvPr id="13" name="Text 10"/>
+          <p:cNvPr id="14" name="Text 11"/>
           <p:cNvSpPr/>
           <p:nvPr/>
         </p:nvSpPr>
@@ -7621,7 +7946,7 @@
       </p:sp>
       <p:sp>
         <p:nvSpPr>
-          <p:cNvPr id="14" name="Shape 11"/>
+          <p:cNvPr id="15" name="Shape 12"/>
           <p:cNvSpPr/>
           <p:nvPr/>
         </p:nvSpPr>
@@ -7648,7 +7973,7 @@
       </p:sp>
       <p:sp>
         <p:nvSpPr>
-          <p:cNvPr id="15" name="Shape 12"/>
+          <p:cNvPr id="16" name="Shape 13"/>
           <p:cNvSpPr/>
           <p:nvPr/>
         </p:nvSpPr>
@@ -7673,7 +7998,7 @@
       </p:sp>
       <p:sp>
         <p:nvSpPr>
-          <p:cNvPr id="16" name="Text 13"/>
+          <p:cNvPr id="17" name="Text 14"/>
           <p:cNvSpPr/>
           <p:nvPr/>
         </p:nvSpPr>
@@ -7711,7 +8036,7 @@
       </p:sp>
       <p:sp>
         <p:nvSpPr>
-          <p:cNvPr id="17" name="Text 14"/>
+          <p:cNvPr id="18" name="Text 15"/>
           <p:cNvSpPr/>
           <p:nvPr/>
         </p:nvSpPr>
@@ -7749,7 +8074,7 @@
       </p:sp>
       <p:sp>
         <p:nvSpPr>
-          <p:cNvPr id="18" name="Text 15"/>
+          <p:cNvPr id="19" name="Text 16"/>
           <p:cNvSpPr/>
           <p:nvPr/>
         </p:nvSpPr>
@@ -7943,7 +8268,48 @@
       </p:sp>
       <p:sp>
         <p:nvSpPr>
-          <p:cNvPr id="4" name="Shape 2"/>
+          <p:cNvPr id="4" name="Text 2"/>
+          <p:cNvSpPr/>
+          <p:nvPr/>
+        </p:nvSpPr>
+        <p:spPr>
+          <a:xfrm>
+            <a:off x="3749040" y="6254496"/>
+            <a:ext cx="7772400" cy="164592"/>
+          </a:xfrm>
+          <a:prstGeom prst="rect">
+            <a:avLst/>
+          </a:prstGeom>
+          <a:noFill/>
+          <a:ln/>
+        </p:spPr>
+        <p:txBody>
+          <a:bodyPr wrap="square" lIns="0" tIns="0" rIns="0" bIns="0" rtlCol="0" anchor="ctr">
+            <a:normAutofit/>
+          </a:bodyPr>
+          <a:lstStyle/>
+          <a:p>
+            <a:pPr algn="r" indent="0" marL="0">
+              <a:buNone/>
+            </a:pPr>
+            <a:r>
+              <a:rPr lang="en-US" sz="730" b="1" spc="35" kern="0" dirty="0">
+                <a:solidFill>
+                  <a:srgbClr val="5E6470"/>
+                </a:solidFill>
+                <a:latin typeface="Arial" pitchFamily="34" charset="0"/>
+                <a:ea typeface="Arial" pitchFamily="34" charset="-122"/>
+                <a:cs typeface="Arial" pitchFamily="34" charset="-120"/>
+              </a:rPr>
+              <a:t>HAWKISH BY VOICE: FINANCIAL MARKET REACTIONS TO FOMC COMMUNICATION  ·  HUI-CHING CHUANG</a:t>
+            </a:r>
+            <a:endParaRPr lang="en-US" sz="730" dirty="0"/>
+          </a:p>
+        </p:txBody>
+      </p:sp>
+      <p:sp>
+        <p:nvSpPr>
+          <p:cNvPr id="5" name="Shape 3"/>
           <p:cNvSpPr/>
           <p:nvPr/>
         </p:nvSpPr>
@@ -7970,7 +8336,7 @@
       </p:sp>
       <p:sp>
         <p:nvSpPr>
-          <p:cNvPr id="5" name="Shape 3"/>
+          <p:cNvPr id="6" name="Shape 4"/>
           <p:cNvSpPr/>
           <p:nvPr/>
         </p:nvSpPr>
@@ -7995,7 +8361,7 @@
       </p:sp>
       <p:sp>
         <p:nvSpPr>
-          <p:cNvPr id="6" name="Text 4"/>
+          <p:cNvPr id="7" name="Text 5"/>
           <p:cNvSpPr/>
           <p:nvPr/>
         </p:nvSpPr>
@@ -8033,7 +8399,7 @@
       </p:sp>
       <p:sp>
         <p:nvSpPr>
-          <p:cNvPr id="7" name="Text 5"/>
+          <p:cNvPr id="8" name="Text 6"/>
           <p:cNvSpPr/>
           <p:nvPr/>
         </p:nvSpPr>
@@ -8071,7 +8437,7 @@
       </p:sp>
       <p:sp>
         <p:nvSpPr>
-          <p:cNvPr id="8" name="Shape 6"/>
+          <p:cNvPr id="9" name="Shape 7"/>
           <p:cNvSpPr/>
           <p:nvPr/>
         </p:nvSpPr>
@@ -8098,7 +8464,7 @@
       </p:sp>
       <p:sp>
         <p:nvSpPr>
-          <p:cNvPr id="9" name="Shape 7"/>
+          <p:cNvPr id="10" name="Shape 8"/>
           <p:cNvSpPr/>
           <p:nvPr/>
         </p:nvSpPr>
@@ -8123,7 +8489,7 @@
       </p:sp>
       <p:sp>
         <p:nvSpPr>
-          <p:cNvPr id="10" name="Text 8"/>
+          <p:cNvPr id="11" name="Text 9"/>
           <p:cNvSpPr/>
           <p:nvPr/>
         </p:nvSpPr>
@@ -8161,7 +8527,7 @@
       </p:sp>
       <p:sp>
         <p:nvSpPr>
-          <p:cNvPr id="11" name="Text 9"/>
+          <p:cNvPr id="12" name="Text 10"/>
           <p:cNvSpPr/>
           <p:nvPr/>
         </p:nvSpPr>
@@ -8199,7 +8565,7 @@
       </p:sp>
       <p:sp>
         <p:nvSpPr>
-          <p:cNvPr id="12" name="Shape 10"/>
+          <p:cNvPr id="13" name="Shape 11"/>
           <p:cNvSpPr/>
           <p:nvPr/>
         </p:nvSpPr>
@@ -8226,7 +8592,7 @@
       </p:sp>
       <p:sp>
         <p:nvSpPr>
-          <p:cNvPr id="13" name="Shape 11"/>
+          <p:cNvPr id="14" name="Shape 12"/>
           <p:cNvSpPr/>
           <p:nvPr/>
         </p:nvSpPr>
@@ -8251,7 +8617,7 @@
       </p:sp>
       <p:sp>
         <p:nvSpPr>
-          <p:cNvPr id="14" name="Text 12"/>
+          <p:cNvPr id="15" name="Text 13"/>
           <p:cNvSpPr/>
           <p:nvPr/>
         </p:nvSpPr>
@@ -8289,7 +8655,7 @@
       </p:sp>
       <p:sp>
         <p:nvSpPr>
-          <p:cNvPr id="15" name="Text 13"/>
+          <p:cNvPr id="16" name="Text 14"/>
           <p:cNvSpPr/>
           <p:nvPr/>
         </p:nvSpPr>
@@ -8327,7 +8693,7 @@
       </p:sp>
       <p:sp>
         <p:nvSpPr>
-          <p:cNvPr id="16" name="Text 14"/>
+          <p:cNvPr id="17" name="Text 15"/>
           <p:cNvSpPr/>
           <p:nvPr/>
         </p:nvSpPr>
@@ -8365,7 +8731,7 @@
       </p:sp>
       <p:sp>
         <p:nvSpPr>
-          <p:cNvPr id="17" name="Text 15"/>
+          <p:cNvPr id="18" name="Text 16"/>
           <p:cNvSpPr/>
           <p:nvPr/>
         </p:nvSpPr>
